--- a/Storyboarding/NewLectures/11_The_Pitch.pptx
+++ b/Storyboarding/NewLectures/11_The_Pitch.pptx
@@ -1502,7 +1502,7 @@
           <a:p/>
           <a:p>
             <a:r>
-              <a:t>And almost nobody teaches it, which is exactly why being decent at it is such an advantage. You are about to be better at this than people with ten years on you, because they were never made to practise it and you are.</a:t>
+              <a:t>And almost nobody teaches it, which is exactly why being decent at it is such an advantage. You are about to be better at this than people with ten years on you, because they were never made to practice it and you are.</a:t>
             </a:r>
           </a:p>
         </p:txBody>
@@ -2112,7 +2112,7 @@
           <a:p/>
           <a:p>
             <a:r>
-              <a:t>And within twenty four hours, post the notes you received and one line on what you'll change. That's what turns this from a performance into a revision, and it's the difference between a pitch that was an experience and a pitch that was useful.</a:t>
+              <a:t>And within twenty-four hours, post the notes you received and one line on what you'll change. That's what turns this from a performance into a revision, and it's the difference between a pitch that was an experience and a pitch that was useful.</a:t>
             </a:r>
           </a:p>
           <a:p/>
@@ -2446,7 +2446,7 @@
           <a:lstStyle/>
           <a:p>
             <a:r>
-              <a:t>Where you'll actually do this.</a:t>
+              <a:t>Where you'll do this.</a:t>
             </a:r>
           </a:p>
           <a:p/>
@@ -2634,7 +2634,7 @@
           <a:p/>
           <a:p>
             <a:r>
-              <a:t>Everything between that sentence and the sequence is stalling. You will be tempted to explain your process, or say how you arrived at the idea, or apologise. Don't. One sentence, then start.</a:t>
+              <a:t>Everything between that sentence and the sequence is stalling. You will be tempted to explain your process, or say how you arrived at the idea, or apologize. Don't. One sentence, then start.</a:t>
             </a:r>
           </a:p>
         </p:txBody>
